--- a/engenharia-software/software-corporativo/boas-praticas/aula-08-controle-acesso/spring-security.pptx
+++ b/engenharia-software/software-corporativo/boas-praticas/aula-08-controle-acesso/spring-security.pptx
@@ -17,7 +17,7 @@
     <p:sldId id="320" r:id="rId8"/>
     <p:sldId id="321" r:id="rId9"/>
     <p:sldId id="324" r:id="rId10"/>
-    <p:sldId id="298" r:id="rId11"/>
+    <p:sldId id="325" r:id="rId11"/>
   </p:sldIdLst>
   <p:sldSz cx="12192000" cy="6858000"/>
   <p:notesSz cx="6858000" cy="9144000"/>
@@ -130,7 +130,7 @@
             <p14:sldId id="320"/>
             <p14:sldId id="321"/>
             <p14:sldId id="324"/>
-            <p14:sldId id="298"/>
+            <p14:sldId id="325"/>
           </p14:sldIdLst>
         </p14:section>
       </p14:sectionLst>
@@ -235,7 +235,7 @@
           <a:p>
             <a:fld id="{87C27BCA-F434-4017-9BD8-33CEB0219D72}" type="datetimeFigureOut">
               <a:rPr lang="pt-BR" smtClean="0"/>
-              <a:t>13/10/2026</a:t>
+              <a:t>18/10/2026</a:t>
             </a:fld>
             <a:endParaRPr lang="pt-BR"/>
           </a:p>
@@ -1071,7 +1071,7 @@
           <a:p>
             <a:fld id="{CDD55C27-F8C6-4481-8569-CAC50CAE9F1F}" type="datetimeFigureOut">
               <a:rPr lang="pt-BR" smtClean="0"/>
-              <a:t>13/10/2026</a:t>
+              <a:t>18/10/2026</a:t>
             </a:fld>
             <a:endParaRPr lang="pt-BR"/>
           </a:p>
@@ -1208,7 +1208,7 @@
           <a:p>
             <a:fld id="{CDD55C27-F8C6-4481-8569-CAC50CAE9F1F}" type="datetimeFigureOut">
               <a:rPr lang="pt-BR" smtClean="0"/>
-              <a:t>13/10/2026</a:t>
+              <a:t>18/10/2026</a:t>
             </a:fld>
             <a:endParaRPr lang="pt-BR"/>
           </a:p>
@@ -1928,7 +1928,7 @@
           <a:p>
             <a:fld id="{CDD55C27-F8C6-4481-8569-CAC50CAE9F1F}" type="datetimeFigureOut">
               <a:rPr lang="pt-BR" smtClean="0"/>
-              <a:t>13/10/2026</a:t>
+              <a:t>18/10/2026</a:t>
             </a:fld>
             <a:endParaRPr lang="pt-BR"/>
           </a:p>
@@ -2108,7 +2108,7 @@
           <a:p>
             <a:fld id="{CDD55C27-F8C6-4481-8569-CAC50CAE9F1F}" type="datetimeFigureOut">
               <a:rPr lang="pt-BR" smtClean="0"/>
-              <a:t>13/10/2026</a:t>
+              <a:t>18/10/2026</a:t>
             </a:fld>
             <a:endParaRPr lang="pt-BR"/>
           </a:p>
@@ -2288,7 +2288,7 @@
           <a:p>
             <a:fld id="{CDD55C27-F8C6-4481-8569-CAC50CAE9F1F}" type="datetimeFigureOut">
               <a:rPr lang="pt-BR" smtClean="0"/>
-              <a:t>13/10/2026</a:t>
+              <a:t>18/10/2026</a:t>
             </a:fld>
             <a:endParaRPr lang="pt-BR"/>
           </a:p>
@@ -2499,7 +2499,7 @@
           <a:p>
             <a:fld id="{CDD55C27-F8C6-4481-8569-CAC50CAE9F1F}" type="datetimeFigureOut">
               <a:rPr lang="pt-BR" smtClean="0"/>
-              <a:t>13/10/2026</a:t>
+              <a:t>18/10/2026</a:t>
             </a:fld>
             <a:endParaRPr lang="pt-BR"/>
           </a:p>
@@ -2954,7 +2954,7 @@
           <a:p>
             <a:fld id="{CDD55C27-F8C6-4481-8569-CAC50CAE9F1F}" type="datetimeFigureOut">
               <a:rPr lang="pt-BR" smtClean="0"/>
-              <a:t>13/10/2026</a:t>
+              <a:t>18/10/2026</a:t>
             </a:fld>
             <a:endParaRPr lang="pt-BR"/>
           </a:p>
@@ -3629,7 +3629,7 @@
           <p:cNvPr id="2" name="Título 1">
             <a:extLst>
               <a:ext uri="{FF2B5EF4-FFF2-40B4-BE49-F238E27FC236}">
-                <a16:creationId xmlns:a16="http://schemas.microsoft.com/office/drawing/2014/main" id="{87650BF0-2C44-C5F0-9056-D4A72A29802F}"/>
+                <a16:creationId xmlns:a16="http://schemas.microsoft.com/office/drawing/2014/main" id="{26E5B3C4-4635-0866-9ACA-B88CCE6E6982}"/>
               </a:ext>
             </a:extLst>
           </p:cNvPr>
@@ -3647,16 +3647,41 @@
           <a:p>
             <a:r>
               <a:rPr lang="pt-BR" dirty="0"/>
-              <a:t>JSON Web Token (JWT) </a:t>
-            </a:r>
-            <a:r>
-              <a:rPr lang="pt-BR" dirty="0" err="1"/>
-              <a:t>Debugger</a:t>
-            </a:r>
-            <a:br>
+              <a:t>Permissões</a:t>
+            </a:r>
+          </a:p>
+        </p:txBody>
+      </p:sp>
+      <p:sp>
+        <p:nvSpPr>
+          <p:cNvPr id="3" name="Espaço Reservado para Conteúdo 2">
+            <a:extLst>
+              <a:ext uri="{FF2B5EF4-FFF2-40B4-BE49-F238E27FC236}">
+                <a16:creationId xmlns:a16="http://schemas.microsoft.com/office/drawing/2014/main" id="{5A336F2B-C7C8-C17F-8B02-3FC6BD32A631}"/>
+              </a:ext>
+            </a:extLst>
+          </p:cNvPr>
+          <p:cNvSpPr>
+            <a:spLocks noGrp="1"/>
+          </p:cNvSpPr>
+          <p:nvPr>
+            <p:ph idx="1"/>
+          </p:nvPr>
+        </p:nvSpPr>
+        <p:spPr>
+          <a:xfrm>
+            <a:off x="592347" y="1844675"/>
+            <a:ext cx="11007306" cy="914567"/>
+          </a:xfrm>
+        </p:spPr>
+        <p:txBody>
+          <a:bodyPr/>
+          <a:lstStyle/>
+          <a:p>
+            <a:r>
               <a:rPr lang="pt-BR" dirty="0"/>
-            </a:br>
-            <a:endParaRPr lang="pt-BR" dirty="0"/>
+              <a:t>Para isso adicione o código abaixo para validação:</a:t>
+            </a:r>
           </a:p>
         </p:txBody>
       </p:sp>
@@ -3665,7 +3690,7 @@
           <p:cNvPr id="4" name="Shape 20">
             <a:extLst>
               <a:ext uri="{FF2B5EF4-FFF2-40B4-BE49-F238E27FC236}">
-                <a16:creationId xmlns:a16="http://schemas.microsoft.com/office/drawing/2014/main" id="{8266CC90-0DAD-400A-8CC5-546ACF88C87C}"/>
+                <a16:creationId xmlns:a16="http://schemas.microsoft.com/office/drawing/2014/main" id="{22966ACD-6D5C-9406-9895-613A81736678}"/>
               </a:ext>
             </a:extLst>
           </p:cNvPr>
@@ -3676,8 +3701,8 @@
         </p:nvSpPr>
         <p:spPr>
           <a:xfrm>
-            <a:off x="749185" y="2115485"/>
-            <a:ext cx="5021695" cy="2604796"/>
+            <a:off x="749185" y="3429000"/>
+            <a:ext cx="10479674" cy="3001808"/>
           </a:xfrm>
           <a:prstGeom prst="roundRect">
             <a:avLst>
@@ -3685,160 +3710,21 @@
             </a:avLst>
           </a:prstGeom>
           <a:solidFill>
-            <a:srgbClr val="F1F1F1"/>
+            <a:srgbClr val="1E1E1E"/>
           </a:solidFill>
           <a:ln>
-            <a:noFill/>
+            <a:solidFill>
+              <a:srgbClr val="1E1E1E"/>
+            </a:solidFill>
           </a:ln>
-          <a:effectLst/>
         </p:spPr>
         <p:txBody>
           <a:bodyPr/>
           <a:lstStyle/>
           <a:p>
-            <a:endParaRPr/>
-          </a:p>
-        </p:txBody>
-      </p:sp>
-      <p:sp>
-        <p:nvSpPr>
-          <p:cNvPr id="5" name="Retângulo 4">
-            <a:extLst>
-              <a:ext uri="{FF2B5EF4-FFF2-40B4-BE49-F238E27FC236}">
-                <a16:creationId xmlns:a16="http://schemas.microsoft.com/office/drawing/2014/main" id="{6900A6DD-5EB2-33E4-5530-115078229CA4}"/>
-              </a:ext>
-            </a:extLst>
-          </p:cNvPr>
-          <p:cNvSpPr>
-            <a:spLocks noGrp="1"/>
-          </p:cNvSpPr>
-          <p:nvPr/>
-        </p:nvSpPr>
-        <p:spPr>
-          <a:xfrm>
-            <a:off x="1556492" y="2297737"/>
-            <a:ext cx="3407081" cy="404274"/>
-          </a:xfrm>
-          <a:prstGeom prst="rect">
-            <a:avLst/>
-          </a:prstGeom>
-        </p:spPr>
-        <p:txBody>
-          <a:bodyPr wrap="square">
-            <a:noAutofit/>
-          </a:bodyPr>
-          <a:lstStyle/>
-          <a:p>
-            <a:pPr algn="l">
-              <a:defRPr sz="2250">
-                <a:solidFill>
-                  <a:srgbClr val="D4D4D4"/>
-                </a:solidFill>
-                <a:latin typeface="Consolas"/>
-                <a:ea typeface="Consolas"/>
-                <a:cs typeface="Consolas"/>
-              </a:defRPr>
-            </a:pPr>
-            <a:r>
-              <a:rPr lang="pt-BR" sz="2250" b="1" dirty="0">
-                <a:solidFill>
-                  <a:srgbClr val="757575"/>
-                </a:solidFill>
-                <a:latin typeface="Consolas"/>
-                <a:ea typeface="Consolas"/>
-                <a:cs typeface="Consolas"/>
-              </a:rPr>
-              <a:t>JSON Web Token (JWT)</a:t>
-            </a:r>
-            <a:endParaRPr sz="2250" b="1" dirty="0">
+            <a:endParaRPr lang="pt-BR" altLang="pt-BR" sz="1600" dirty="0">
               <a:solidFill>
-                <a:srgbClr val="757575"/>
-              </a:solidFill>
-              <a:latin typeface="Consolas"/>
-              <a:ea typeface="Consolas"/>
-              <a:cs typeface="Consolas"/>
-            </a:endParaRPr>
-          </a:p>
-        </p:txBody>
-      </p:sp>
-      <p:sp>
-        <p:nvSpPr>
-          <p:cNvPr id="8" name="Shape 20">
-            <a:extLst>
-              <a:ext uri="{FF2B5EF4-FFF2-40B4-BE49-F238E27FC236}">
-                <a16:creationId xmlns:a16="http://schemas.microsoft.com/office/drawing/2014/main" id="{67C2ACCC-A0C7-62BA-485E-D7BD9ADE6E0A}"/>
-              </a:ext>
-            </a:extLst>
-          </p:cNvPr>
-          <p:cNvSpPr>
-            <a:spLocks noGrp="1"/>
-          </p:cNvSpPr>
-          <p:nvPr/>
-        </p:nvSpPr>
-        <p:spPr>
-          <a:xfrm>
-            <a:off x="917733" y="2895225"/>
-            <a:ext cx="4734403" cy="1693251"/>
-          </a:xfrm>
-          <a:prstGeom prst="roundRect">
-            <a:avLst>
-              <a:gd name="adj" fmla="val 8081"/>
-            </a:avLst>
-          </a:prstGeom>
-          <a:solidFill>
-            <a:schemeClr val="bg1"/>
-          </a:solidFill>
-          <a:ln>
-            <a:noFill/>
-          </a:ln>
-          <a:effectLst/>
-        </p:spPr>
-        <p:txBody>
-          <a:bodyPr/>
-          <a:lstStyle/>
-          <a:p>
-            <a:r>
-              <a:rPr lang="pt-BR" b="1" dirty="0">
-                <a:solidFill>
-                  <a:srgbClr val="E8823E"/>
-                </a:solidFill>
-                <a:latin typeface="Consolas" panose="020B0609020204030204" pitchFamily="49" charset="0"/>
-              </a:rPr>
-              <a:t>eyJhbGciOiJIUzI1NiIsInR5cCI6IkpXVCJ9</a:t>
-            </a:r>
-            <a:r>
-              <a:rPr lang="pt-BR" dirty="0">
-                <a:latin typeface="Consolas" panose="020B0609020204030204" pitchFamily="49" charset="0"/>
-              </a:rPr>
-              <a:t>.</a:t>
-            </a:r>
-            <a:r>
-              <a:rPr lang="pt-BR" b="1" dirty="0">
-                <a:solidFill>
-                  <a:srgbClr val="968BF9"/>
-                </a:solidFill>
-                <a:latin typeface="Consolas" panose="020B0609020204030204" pitchFamily="49" charset="0"/>
-              </a:rPr>
-              <a:t>eyJpc3MiOiJBUEkgRGVudGlzdGEiLCJzdWIiOiJwZWRyb0BnbWFpbC5jb20iLCJleHAiOjE3OTA2NDYzMzR9</a:t>
-            </a:r>
-            <a:r>
-              <a:rPr lang="pt-BR" dirty="0">
-                <a:latin typeface="Consolas" panose="020B0609020204030204" pitchFamily="49" charset="0"/>
-              </a:rPr>
-              <a:t>.</a:t>
-            </a:r>
-            <a:r>
-              <a:rPr lang="pt-BR" b="1" dirty="0">
-                <a:solidFill>
-                  <a:srgbClr val="0C945D"/>
-                </a:solidFill>
-                <a:latin typeface="Consolas" panose="020B0609020204030204" pitchFamily="49" charset="0"/>
-              </a:rPr>
-              <a:t>M_EYnADTjDNKXJj7RJTpyyQRxQ5fRBp3bMJj6nT0xsk</a:t>
-            </a:r>
-            <a:endParaRPr b="1" dirty="0">
-              <a:solidFill>
-                <a:srgbClr val="0C945D"/>
+                <a:srgbClr val="B3AE60"/>
               </a:solidFill>
               <a:latin typeface="Consolas" panose="020B0609020204030204" pitchFamily="49" charset="0"/>
             </a:endParaRPr>
@@ -3847,246 +3733,20 @@
       </p:sp>
       <p:sp>
         <p:nvSpPr>
-          <p:cNvPr id="11" name="Shape 20">
-            <a:extLst>
-              <a:ext uri="{FF2B5EF4-FFF2-40B4-BE49-F238E27FC236}">
-                <a16:creationId xmlns:a16="http://schemas.microsoft.com/office/drawing/2014/main" id="{48007F21-3F63-8F13-C876-63881DF3AA8C}"/>
-              </a:ext>
-            </a:extLst>
-          </p:cNvPr>
-          <p:cNvSpPr>
-            <a:spLocks noGrp="1"/>
-          </p:cNvSpPr>
+          <p:cNvPr id="6" name="CaixaDeTexto 5">
+            <a:extLst>
+              <a:ext uri="{FF2B5EF4-FFF2-40B4-BE49-F238E27FC236}">
+                <a16:creationId xmlns:a16="http://schemas.microsoft.com/office/drawing/2014/main" id="{807D562E-1D2E-7F5A-17D7-FFD266444DA0}"/>
+              </a:ext>
+            </a:extLst>
+          </p:cNvPr>
+          <p:cNvSpPr txBox="1"/>
           <p:nvPr/>
         </p:nvSpPr>
         <p:spPr>
           <a:xfrm>
-            <a:off x="6371316" y="2104524"/>
-            <a:ext cx="5021695" cy="2604796"/>
-          </a:xfrm>
-          <a:prstGeom prst="roundRect">
-            <a:avLst>
-              <a:gd name="adj" fmla="val 8081"/>
-            </a:avLst>
-          </a:prstGeom>
-          <a:solidFill>
-            <a:srgbClr val="F1F1F1"/>
-          </a:solidFill>
-          <a:ln>
-            <a:noFill/>
-          </a:ln>
-          <a:effectLst/>
-        </p:spPr>
-        <p:txBody>
-          <a:bodyPr/>
-          <a:lstStyle/>
-          <a:p>
-            <a:endParaRPr/>
-          </a:p>
-        </p:txBody>
-      </p:sp>
-      <p:sp>
-        <p:nvSpPr>
-          <p:cNvPr id="12" name="Retângulo 11">
-            <a:extLst>
-              <a:ext uri="{FF2B5EF4-FFF2-40B4-BE49-F238E27FC236}">
-                <a16:creationId xmlns:a16="http://schemas.microsoft.com/office/drawing/2014/main" id="{7E59C0F0-D10A-C5A8-6DE5-0ADFC48E6F35}"/>
-              </a:ext>
-            </a:extLst>
-          </p:cNvPr>
-          <p:cNvSpPr>
-            <a:spLocks noGrp="1"/>
-          </p:cNvSpPr>
-          <p:nvPr/>
-        </p:nvSpPr>
-        <p:spPr>
-          <a:xfrm>
-            <a:off x="8270315" y="2297737"/>
-            <a:ext cx="1223697" cy="404274"/>
-          </a:xfrm>
-          <a:prstGeom prst="rect">
-            <a:avLst/>
-          </a:prstGeom>
-        </p:spPr>
-        <p:txBody>
-          <a:bodyPr wrap="square">
-            <a:noAutofit/>
-          </a:bodyPr>
-          <a:lstStyle/>
-          <a:p>
-            <a:pPr algn="l">
-              <a:defRPr sz="2250">
-                <a:solidFill>
-                  <a:srgbClr val="D4D4D4"/>
-                </a:solidFill>
-                <a:latin typeface="Consolas"/>
-                <a:ea typeface="Consolas"/>
-                <a:cs typeface="Consolas"/>
-              </a:defRPr>
-            </a:pPr>
-            <a:r>
-              <a:rPr lang="pt-BR" b="1" dirty="0">
-                <a:solidFill>
-                  <a:srgbClr val="E8823E"/>
-                </a:solidFill>
-                <a:latin typeface="Consolas" panose="020B0609020204030204" pitchFamily="49" charset="0"/>
-              </a:rPr>
-              <a:t>Header</a:t>
-            </a:r>
-            <a:endParaRPr b="1" dirty="0">
-              <a:solidFill>
-                <a:srgbClr val="E8823E"/>
-              </a:solidFill>
-              <a:latin typeface="Consolas" panose="020B0609020204030204" pitchFamily="49" charset="0"/>
-            </a:endParaRPr>
-          </a:p>
-        </p:txBody>
-      </p:sp>
-      <p:sp>
-        <p:nvSpPr>
-          <p:cNvPr id="13" name="Shape 20">
-            <a:extLst>
-              <a:ext uri="{FF2B5EF4-FFF2-40B4-BE49-F238E27FC236}">
-                <a16:creationId xmlns:a16="http://schemas.microsoft.com/office/drawing/2014/main" id="{0DDCD626-A080-C1D9-3226-69D224FF1AC4}"/>
-              </a:ext>
-            </a:extLst>
-          </p:cNvPr>
-          <p:cNvSpPr>
-            <a:spLocks noGrp="1"/>
-          </p:cNvSpPr>
-          <p:nvPr/>
-        </p:nvSpPr>
-        <p:spPr>
-          <a:xfrm>
-            <a:off x="6539864" y="2895226"/>
-            <a:ext cx="4734403" cy="1693250"/>
-          </a:xfrm>
-          <a:prstGeom prst="roundRect">
-            <a:avLst>
-              <a:gd name="adj" fmla="val 8081"/>
-            </a:avLst>
-          </a:prstGeom>
-          <a:solidFill>
-            <a:schemeClr val="bg1"/>
-          </a:solidFill>
-          <a:ln>
-            <a:noFill/>
-          </a:ln>
-          <a:effectLst/>
-        </p:spPr>
-        <p:txBody>
-          <a:bodyPr/>
-          <a:lstStyle/>
-          <a:p>
-            <a:r>
-              <a:rPr lang="pt-BR" b="1" dirty="0">
-                <a:latin typeface="Consolas" panose="020B0609020204030204" pitchFamily="49" charset="0"/>
-              </a:rPr>
-              <a:t>{</a:t>
-            </a:r>
-          </a:p>
-          <a:p>
-            <a:r>
-              <a:rPr lang="pt-BR" b="1" dirty="0">
-                <a:latin typeface="Consolas" panose="020B0609020204030204" pitchFamily="49" charset="0"/>
-              </a:rPr>
-              <a:t>  "</a:t>
-            </a:r>
-            <a:r>
-              <a:rPr lang="pt-BR" b="1" dirty="0" err="1">
-                <a:latin typeface="Consolas" panose="020B0609020204030204" pitchFamily="49" charset="0"/>
-              </a:rPr>
-              <a:t>alg</a:t>
-            </a:r>
-            <a:r>
-              <a:rPr lang="pt-BR" b="1" dirty="0">
-                <a:latin typeface="Consolas" panose="020B0609020204030204" pitchFamily="49" charset="0"/>
-              </a:rPr>
-              <a:t>": </a:t>
-            </a:r>
-            <a:r>
-              <a:rPr lang="pt-BR" b="1" dirty="0">
-                <a:solidFill>
-                  <a:srgbClr val="0C945D"/>
-                </a:solidFill>
-                <a:latin typeface="Consolas" panose="020B0609020204030204" pitchFamily="49" charset="0"/>
-              </a:rPr>
-              <a:t>"HS256"</a:t>
-            </a:r>
-            <a:r>
-              <a:rPr lang="pt-BR" b="1" dirty="0">
-                <a:latin typeface="Consolas" panose="020B0609020204030204" pitchFamily="49" charset="0"/>
-              </a:rPr>
-              <a:t>,</a:t>
-            </a:r>
-          </a:p>
-          <a:p>
-            <a:r>
-              <a:rPr lang="pt-BR" b="1" dirty="0">
-                <a:solidFill>
-                  <a:srgbClr val="0C945D"/>
-                </a:solidFill>
-                <a:latin typeface="Consolas" panose="020B0609020204030204" pitchFamily="49" charset="0"/>
-              </a:rPr>
-              <a:t>  </a:t>
-            </a:r>
-            <a:r>
-              <a:rPr lang="pt-BR" b="1" dirty="0">
-                <a:latin typeface="Consolas" panose="020B0609020204030204" pitchFamily="49" charset="0"/>
-              </a:rPr>
-              <a:t>"</a:t>
-            </a:r>
-            <a:r>
-              <a:rPr lang="pt-BR" b="1" dirty="0" err="1">
-                <a:latin typeface="Consolas" panose="020B0609020204030204" pitchFamily="49" charset="0"/>
-              </a:rPr>
-              <a:t>typ</a:t>
-            </a:r>
-            <a:r>
-              <a:rPr lang="pt-BR" b="1" dirty="0">
-                <a:latin typeface="Consolas" panose="020B0609020204030204" pitchFamily="49" charset="0"/>
-              </a:rPr>
-              <a:t>": </a:t>
-            </a:r>
-            <a:r>
-              <a:rPr lang="pt-BR" b="1" dirty="0">
-                <a:solidFill>
-                  <a:srgbClr val="0C945D"/>
-                </a:solidFill>
-                <a:latin typeface="Consolas" panose="020B0609020204030204" pitchFamily="49" charset="0"/>
-              </a:rPr>
-              <a:t>"JWT"</a:t>
-            </a:r>
-          </a:p>
-          <a:p>
-            <a:r>
-              <a:rPr lang="pt-BR" b="1" dirty="0">
-                <a:latin typeface="Consolas" panose="020B0609020204030204" pitchFamily="49" charset="0"/>
-              </a:rPr>
-              <a:t>}</a:t>
-            </a:r>
-            <a:endParaRPr b="1" dirty="0">
-              <a:latin typeface="Consolas" panose="020B0609020204030204" pitchFamily="49" charset="0"/>
-            </a:endParaRPr>
-          </a:p>
-        </p:txBody>
-      </p:sp>
-      <p:sp>
-        <p:nvSpPr>
-          <p:cNvPr id="18" name="CaixaDeTexto 17">
-            <a:extLst>
-              <a:ext uri="{FF2B5EF4-FFF2-40B4-BE49-F238E27FC236}">
-                <a16:creationId xmlns:a16="http://schemas.microsoft.com/office/drawing/2014/main" id="{0521DA90-EE58-D051-0A5D-03B31B96D164}"/>
-              </a:ext>
-            </a:extLst>
-          </p:cNvPr>
-          <p:cNvSpPr txBox="1"/>
-          <p:nvPr/>
-        </p:nvSpPr>
-        <p:spPr>
-          <a:xfrm>
-            <a:off x="917733" y="4992130"/>
-            <a:ext cx="10475278" cy="1200329"/>
+            <a:off x="1163052" y="3637243"/>
+            <a:ext cx="6472989" cy="2585323"/>
           </a:xfrm>
           <a:prstGeom prst="rect">
             <a:avLst/>
@@ -4094,105 +3754,405 @@
           <a:noFill/>
         </p:spPr>
         <p:txBody>
-          <a:bodyPr wrap="square" rtlCol="0">
+          <a:bodyPr wrap="square">
             <a:spAutoFit/>
           </a:bodyPr>
           <a:lstStyle/>
           <a:p>
-            <a:pPr algn="just"/>
-            <a:r>
-              <a:rPr lang="pt-BR" b="1" dirty="0" err="1">
-                <a:latin typeface="Times New Roman" panose="02020603050405020304" pitchFamily="18" charset="0"/>
-                <a:cs typeface="Times New Roman" panose="02020603050405020304" pitchFamily="18" charset="0"/>
-              </a:rPr>
-              <a:t>alg</a:t>
-            </a:r>
-            <a:r>
-              <a:rPr lang="pt-BR" b="1" dirty="0">
-                <a:latin typeface="Times New Roman" panose="02020603050405020304" pitchFamily="18" charset="0"/>
-                <a:cs typeface="Times New Roman" panose="02020603050405020304" pitchFamily="18" charset="0"/>
-              </a:rPr>
-              <a:t> - </a:t>
-            </a:r>
+            <a:pPr>
+              <a:buNone/>
+            </a:pPr>
             <a:r>
               <a:rPr lang="pt-BR" dirty="0">
-                <a:latin typeface="Times New Roman" panose="02020603050405020304" pitchFamily="18" charset="0"/>
-                <a:cs typeface="Times New Roman" panose="02020603050405020304" pitchFamily="18" charset="0"/>
-              </a:rPr>
-              <a:t>Indica o algoritmo usado na assinatura. HS256 significa </a:t>
-            </a:r>
-            <a:r>
-              <a:rPr lang="pt-BR" b="1" dirty="0">
-                <a:latin typeface="Times New Roman" panose="02020603050405020304" pitchFamily="18" charset="0"/>
-                <a:cs typeface="Times New Roman" panose="02020603050405020304" pitchFamily="18" charset="0"/>
-              </a:rPr>
-              <a:t>HMAC com SHA-256</a:t>
+                <a:solidFill>
+                  <a:srgbClr val="BCBEC4"/>
+                </a:solidFill>
+                <a:effectLst/>
+                <a:latin typeface="JetBrains Mono"/>
+              </a:rPr>
+              <a:t>.</a:t>
+            </a:r>
+            <a:r>
+              <a:rPr lang="pt-BR" dirty="0" err="1">
+                <a:solidFill>
+                  <a:srgbClr val="BCBEC4"/>
+                </a:solidFill>
+                <a:effectLst/>
+                <a:latin typeface="JetBrains Mono"/>
+              </a:rPr>
+              <a:t>authorizeHttpRequests</a:t>
             </a:r>
             <a:r>
               <a:rPr lang="pt-BR" dirty="0">
-                <a:latin typeface="Times New Roman" panose="02020603050405020304" pitchFamily="18" charset="0"/>
-                <a:cs typeface="Times New Roman" panose="02020603050405020304" pitchFamily="18" charset="0"/>
-              </a:rPr>
-              <a:t>, que utiliza uma chave secreta.</a:t>
-            </a:r>
-          </a:p>
-          <a:p>
-            <a:pPr algn="just"/>
-            <a:endParaRPr lang="pt-BR" dirty="0">
-              <a:latin typeface="Times New Roman" panose="02020603050405020304" pitchFamily="18" charset="0"/>
-              <a:cs typeface="Times New Roman" panose="02020603050405020304" pitchFamily="18" charset="0"/>
-            </a:endParaRPr>
-          </a:p>
-          <a:p>
-            <a:pPr algn="just"/>
-            <a:r>
-              <a:rPr lang="pt-BR" b="1" dirty="0" err="1">
-                <a:latin typeface="Times New Roman" panose="02020603050405020304" pitchFamily="18" charset="0"/>
-                <a:cs typeface="Times New Roman" panose="02020603050405020304" pitchFamily="18" charset="0"/>
-              </a:rPr>
-              <a:t>typ</a:t>
-            </a:r>
-            <a:r>
-              <a:rPr lang="pt-BR" b="1" dirty="0">
-                <a:latin typeface="Times New Roman" panose="02020603050405020304" pitchFamily="18" charset="0"/>
-                <a:cs typeface="Times New Roman" panose="02020603050405020304" pitchFamily="18" charset="0"/>
-              </a:rPr>
-              <a:t> - </a:t>
+                <a:solidFill>
+                  <a:srgbClr val="BCBEC4"/>
+                </a:solidFill>
+                <a:effectLst/>
+                <a:latin typeface="JetBrains Mono"/>
+              </a:rPr>
+              <a:t>(</a:t>
+            </a:r>
+            <a:r>
+              <a:rPr lang="pt-BR" dirty="0" err="1">
+                <a:solidFill>
+                  <a:srgbClr val="BCBEC4"/>
+                </a:solidFill>
+                <a:effectLst/>
+                <a:latin typeface="JetBrains Mono"/>
+              </a:rPr>
+              <a:t>auth</a:t>
             </a:r>
             <a:r>
               <a:rPr lang="pt-BR" dirty="0">
-                <a:latin typeface="Times New Roman" panose="02020603050405020304" pitchFamily="18" charset="0"/>
-                <a:cs typeface="Times New Roman" panose="02020603050405020304" pitchFamily="18" charset="0"/>
-              </a:rPr>
-              <a:t>Indica o tipo do token. Nesse caso, </a:t>
-            </a:r>
-            <a:r>
-              <a:rPr lang="pt-BR" b="1" dirty="0">
-                <a:latin typeface="Times New Roman" panose="02020603050405020304" pitchFamily="18" charset="0"/>
-                <a:cs typeface="Times New Roman" panose="02020603050405020304" pitchFamily="18" charset="0"/>
-              </a:rPr>
-              <a:t>JWT</a:t>
-            </a:r>
-            <a:r>
+                <a:solidFill>
+                  <a:srgbClr val="BCBEC4"/>
+                </a:solidFill>
+                <a:effectLst/>
+                <a:latin typeface="JetBrains Mono"/>
+              </a:rPr>
+              <a:t> -&gt; </a:t>
+            </a:r>
+            <a:r>
+              <a:rPr lang="pt-BR" dirty="0" err="1">
+                <a:solidFill>
+                  <a:srgbClr val="BCBEC4"/>
+                </a:solidFill>
+                <a:effectLst/>
+                <a:latin typeface="JetBrains Mono"/>
+              </a:rPr>
+              <a:t>auth</a:t>
+            </a:r>
+            <a:br>
               <a:rPr lang="pt-BR" dirty="0">
-                <a:latin typeface="Times New Roman" panose="02020603050405020304" pitchFamily="18" charset="0"/>
-                <a:cs typeface="Times New Roman" panose="02020603050405020304" pitchFamily="18" charset="0"/>
-              </a:rPr>
-              <a:t> (</a:t>
-            </a:r>
-            <a:r>
-              <a:rPr lang="pt-BR" i="1" dirty="0">
-                <a:latin typeface="Times New Roman" panose="02020603050405020304" pitchFamily="18" charset="0"/>
-                <a:cs typeface="Times New Roman" panose="02020603050405020304" pitchFamily="18" charset="0"/>
-              </a:rPr>
-              <a:t>JSON Web Token</a:t>
-            </a:r>
+                <a:solidFill>
+                  <a:srgbClr val="BCBEC4"/>
+                </a:solidFill>
+                <a:effectLst/>
+                <a:latin typeface="JetBrains Mono"/>
+              </a:rPr>
+            </a:br>
             <a:r>
               <a:rPr lang="pt-BR" dirty="0">
-                <a:latin typeface="Times New Roman" panose="02020603050405020304" pitchFamily="18" charset="0"/>
-                <a:cs typeface="Times New Roman" panose="02020603050405020304" pitchFamily="18" charset="0"/>
+                <a:solidFill>
+                  <a:srgbClr val="BCBEC4"/>
+                </a:solidFill>
+                <a:effectLst/>
+                <a:latin typeface="JetBrains Mono"/>
+              </a:rPr>
+              <a:t>        .</a:t>
+            </a:r>
+            <a:r>
+              <a:rPr lang="pt-BR" dirty="0" err="1">
+                <a:solidFill>
+                  <a:srgbClr val="BCBEC4"/>
+                </a:solidFill>
+                <a:effectLst/>
+                <a:latin typeface="JetBrains Mono"/>
+              </a:rPr>
+              <a:t>requestMatchers</a:t>
+            </a:r>
+            <a:r>
+              <a:rPr lang="pt-BR" dirty="0">
+                <a:solidFill>
+                  <a:srgbClr val="BCBEC4"/>
+                </a:solidFill>
+                <a:effectLst/>
+                <a:latin typeface="JetBrains Mono"/>
+              </a:rPr>
+              <a:t>(</a:t>
+            </a:r>
+            <a:r>
+              <a:rPr lang="pt-BR" dirty="0" err="1">
+                <a:solidFill>
+                  <a:srgbClr val="BCBEC4"/>
+                </a:solidFill>
+                <a:effectLst/>
+                <a:latin typeface="JetBrains Mono"/>
+              </a:rPr>
+              <a:t>HttpMethod.</a:t>
+            </a:r>
+            <a:r>
+              <a:rPr lang="pt-BR" i="1" dirty="0" err="1">
+                <a:solidFill>
+                  <a:srgbClr val="C77DBB"/>
+                </a:solidFill>
+                <a:effectLst/>
+                <a:latin typeface="JetBrains Mono"/>
+              </a:rPr>
+              <a:t>POST</a:t>
+            </a:r>
+            <a:r>
+              <a:rPr lang="pt-BR" dirty="0">
+                <a:solidFill>
+                  <a:srgbClr val="BCBEC4"/>
+                </a:solidFill>
+                <a:effectLst/>
+                <a:latin typeface="JetBrains Mono"/>
+              </a:rPr>
+              <a:t>, </a:t>
+            </a:r>
+            <a:r>
+              <a:rPr lang="pt-BR" dirty="0">
+                <a:solidFill>
+                  <a:srgbClr val="6AAB73"/>
+                </a:solidFill>
+                <a:effectLst/>
+                <a:latin typeface="JetBrains Mono"/>
+              </a:rPr>
+              <a:t>"/login"</a:t>
+            </a:r>
+            <a:r>
+              <a:rPr lang="pt-BR" dirty="0">
+                <a:solidFill>
+                  <a:srgbClr val="BCBEC4"/>
+                </a:solidFill>
+                <a:effectLst/>
+                <a:latin typeface="JetBrains Mono"/>
               </a:rPr>
               <a:t>).</a:t>
+            </a:r>
+            <a:r>
+              <a:rPr lang="pt-BR" dirty="0" err="1">
+                <a:solidFill>
+                  <a:srgbClr val="BCBEC4"/>
+                </a:solidFill>
+                <a:effectLst/>
+                <a:latin typeface="JetBrains Mono"/>
+              </a:rPr>
+              <a:t>permitAll</a:t>
+            </a:r>
+            <a:r>
+              <a:rPr lang="pt-BR" dirty="0">
+                <a:solidFill>
+                  <a:srgbClr val="BCBEC4"/>
+                </a:solidFill>
+                <a:effectLst/>
+                <a:latin typeface="JetBrains Mono"/>
+              </a:rPr>
+              <a:t>()</a:t>
+            </a:r>
+            <a:br>
+              <a:rPr lang="pt-BR" dirty="0">
+                <a:solidFill>
+                  <a:srgbClr val="BCBEC4"/>
+                </a:solidFill>
+                <a:effectLst/>
+                <a:latin typeface="JetBrains Mono"/>
+              </a:rPr>
+            </a:br>
+            <a:r>
+              <a:rPr lang="pt-BR" dirty="0">
+                <a:solidFill>
+                  <a:srgbClr val="BCBEC4"/>
+                </a:solidFill>
+                <a:effectLst/>
+                <a:latin typeface="JetBrains Mono"/>
+              </a:rPr>
+              <a:t>        .</a:t>
+            </a:r>
+            <a:r>
+              <a:rPr lang="pt-BR" dirty="0" err="1">
+                <a:solidFill>
+                  <a:srgbClr val="BCBEC4"/>
+                </a:solidFill>
+                <a:effectLst/>
+                <a:latin typeface="JetBrains Mono"/>
+              </a:rPr>
+              <a:t>anyRequest</a:t>
+            </a:r>
+            <a:r>
+              <a:rPr lang="pt-BR" dirty="0">
+                <a:solidFill>
+                  <a:srgbClr val="BCBEC4"/>
+                </a:solidFill>
+                <a:effectLst/>
+                <a:latin typeface="JetBrains Mono"/>
+              </a:rPr>
+              <a:t>().</a:t>
+            </a:r>
+            <a:r>
+              <a:rPr lang="pt-BR" dirty="0" err="1">
+                <a:solidFill>
+                  <a:srgbClr val="BCBEC4"/>
+                </a:solidFill>
+                <a:effectLst/>
+                <a:latin typeface="JetBrains Mono"/>
+              </a:rPr>
+              <a:t>authenticated</a:t>
+            </a:r>
+            <a:r>
+              <a:rPr lang="pt-BR" dirty="0">
+                <a:solidFill>
+                  <a:srgbClr val="BCBEC4"/>
+                </a:solidFill>
+                <a:effectLst/>
+                <a:latin typeface="JetBrains Mono"/>
+              </a:rPr>
+              <a:t>()</a:t>
+            </a:r>
+            <a:br>
+              <a:rPr lang="pt-BR" dirty="0">
+                <a:solidFill>
+                  <a:srgbClr val="BCBEC4"/>
+                </a:solidFill>
+                <a:effectLst/>
+                <a:latin typeface="JetBrains Mono"/>
+              </a:rPr>
+            </a:br>
+            <a:r>
+              <a:rPr lang="pt-BR" dirty="0">
+                <a:solidFill>
+                  <a:srgbClr val="BCBEC4"/>
+                </a:solidFill>
+                <a:effectLst/>
+                <a:latin typeface="JetBrains Mono"/>
+              </a:rPr>
+              <a:t>)</a:t>
+            </a:r>
+            <a:br>
+              <a:rPr lang="pt-BR" dirty="0">
+                <a:solidFill>
+                  <a:srgbClr val="BCBEC4"/>
+                </a:solidFill>
+                <a:effectLst/>
+                <a:latin typeface="JetBrains Mono"/>
+              </a:rPr>
+            </a:br>
+            <a:br>
+              <a:rPr lang="pt-BR" dirty="0">
+                <a:solidFill>
+                  <a:srgbClr val="BCBEC4"/>
+                </a:solidFill>
+                <a:effectLst/>
+                <a:latin typeface="JetBrains Mono"/>
+              </a:rPr>
+            </a:br>
+            <a:r>
+              <a:rPr lang="pt-BR" dirty="0">
+                <a:solidFill>
+                  <a:srgbClr val="BCBEC4"/>
+                </a:solidFill>
+                <a:effectLst/>
+                <a:latin typeface="JetBrains Mono"/>
+              </a:rPr>
+              <a:t>.</a:t>
+            </a:r>
+            <a:r>
+              <a:rPr lang="pt-BR" dirty="0" err="1">
+                <a:solidFill>
+                  <a:srgbClr val="BCBEC4"/>
+                </a:solidFill>
+                <a:effectLst/>
+                <a:latin typeface="JetBrains Mono"/>
+              </a:rPr>
+              <a:t>addFilterBefore</a:t>
+            </a:r>
+            <a:r>
+              <a:rPr lang="pt-BR" dirty="0">
+                <a:solidFill>
+                  <a:srgbClr val="BCBEC4"/>
+                </a:solidFill>
+                <a:effectLst/>
+                <a:latin typeface="JetBrains Mono"/>
+              </a:rPr>
+              <a:t>(</a:t>
+            </a:r>
+            <a:br>
+              <a:rPr lang="pt-BR" dirty="0">
+                <a:solidFill>
+                  <a:srgbClr val="BCBEC4"/>
+                </a:solidFill>
+                <a:effectLst/>
+                <a:latin typeface="JetBrains Mono"/>
+              </a:rPr>
+            </a:br>
+            <a:r>
+              <a:rPr lang="pt-BR" dirty="0">
+                <a:solidFill>
+                  <a:srgbClr val="BCBEC4"/>
+                </a:solidFill>
+                <a:effectLst/>
+                <a:latin typeface="JetBrains Mono"/>
+              </a:rPr>
+              <a:t>    </a:t>
+            </a:r>
+            <a:r>
+              <a:rPr lang="pt-BR" dirty="0" err="1">
+                <a:solidFill>
+                  <a:srgbClr val="C77DBB"/>
+                </a:solidFill>
+                <a:effectLst/>
+                <a:latin typeface="JetBrains Mono"/>
+              </a:rPr>
+              <a:t>securityFilter</a:t>
+            </a:r>
+            <a:r>
+              <a:rPr lang="pt-BR" dirty="0">
+                <a:solidFill>
+                  <a:srgbClr val="BCBEC4"/>
+                </a:solidFill>
+                <a:effectLst/>
+                <a:latin typeface="JetBrains Mono"/>
+              </a:rPr>
+              <a:t>,</a:t>
+            </a:r>
+            <a:br>
+              <a:rPr lang="pt-BR" dirty="0">
+                <a:solidFill>
+                  <a:srgbClr val="BCBEC4"/>
+                </a:solidFill>
+                <a:effectLst/>
+                <a:latin typeface="JetBrains Mono"/>
+              </a:rPr>
+            </a:br>
+            <a:r>
+              <a:rPr lang="pt-BR" dirty="0">
+                <a:solidFill>
+                  <a:srgbClr val="BCBEC4"/>
+                </a:solidFill>
+                <a:effectLst/>
+                <a:latin typeface="JetBrains Mono"/>
+              </a:rPr>
+              <a:t>    </a:t>
+            </a:r>
+            <a:r>
+              <a:rPr lang="pt-BR" dirty="0" err="1">
+                <a:solidFill>
+                  <a:srgbClr val="BCBEC4"/>
+                </a:solidFill>
+                <a:effectLst/>
+                <a:latin typeface="JetBrains Mono"/>
+              </a:rPr>
+              <a:t>UsernamePasswordAuthenticationFilter.</a:t>
+            </a:r>
+            <a:r>
+              <a:rPr lang="pt-BR" dirty="0" err="1">
+                <a:solidFill>
+                  <a:srgbClr val="CF8E6D"/>
+                </a:solidFill>
+                <a:effectLst/>
+                <a:latin typeface="JetBrains Mono"/>
+              </a:rPr>
+              <a:t>class</a:t>
+            </a:r>
+            <a:br>
+              <a:rPr lang="pt-BR" dirty="0">
+                <a:solidFill>
+                  <a:srgbClr val="CF8E6D"/>
+                </a:solidFill>
+                <a:effectLst/>
+                <a:latin typeface="JetBrains Mono"/>
+              </a:rPr>
+            </a:br>
+            <a:r>
+              <a:rPr lang="pt-BR" dirty="0">
+                <a:solidFill>
+                  <a:srgbClr val="BCBEC4"/>
+                </a:solidFill>
+                <a:effectLst/>
+                <a:latin typeface="JetBrains Mono"/>
+              </a:rPr>
+              <a:t>)</a:t>
             </a:r>
           </a:p>
         </p:txBody>
@@ -4200,7 +4160,7 @@
     </p:spTree>
     <p:extLst>
       <p:ext uri="{BB962C8B-B14F-4D97-AF65-F5344CB8AC3E}">
-        <p14:creationId xmlns:p14="http://schemas.microsoft.com/office/powerpoint/2010/main" val="1619611297"/>
+        <p14:creationId xmlns:p14="http://schemas.microsoft.com/office/powerpoint/2010/main" val="3881277893"/>
       </p:ext>
     </p:extLst>
   </p:cSld>
@@ -5340,12 +5300,847 @@
             <p:ph idx="1"/>
           </p:nvPr>
         </p:nvSpPr>
-        <p:spPr/>
+        <p:spPr>
+          <a:xfrm>
+            <a:off x="592347" y="1700398"/>
+            <a:ext cx="11007306" cy="986757"/>
+          </a:xfrm>
+        </p:spPr>
         <p:txBody>
           <a:bodyPr/>
           <a:lstStyle/>
           <a:p>
-            <a:endParaRPr lang="pt-BR"/>
+            <a:r>
+              <a:rPr lang="pt-BR" dirty="0"/>
+              <a:t>Para validar o token devemos acessar o site </a:t>
+            </a:r>
+            <a:r>
+              <a:rPr lang="pt-BR" dirty="0">
+                <a:hlinkClick r:id="rId2"/>
+              </a:rPr>
+              <a:t>jwt.io</a:t>
+            </a:r>
+            <a:r>
+              <a:rPr lang="pt-BR" dirty="0"/>
+              <a:t> e insira o seguinte código:</a:t>
+            </a:r>
+          </a:p>
+        </p:txBody>
+      </p:sp>
+      <p:sp>
+        <p:nvSpPr>
+          <p:cNvPr id="4" name="Shape 20">
+            <a:extLst>
+              <a:ext uri="{FF2B5EF4-FFF2-40B4-BE49-F238E27FC236}">
+                <a16:creationId xmlns:a16="http://schemas.microsoft.com/office/drawing/2014/main" id="{76CE5B79-7649-0D81-1E74-3C2ED4CF01DC}"/>
+              </a:ext>
+            </a:extLst>
+          </p:cNvPr>
+          <p:cNvSpPr>
+            <a:spLocks noGrp="1"/>
+          </p:cNvSpPr>
+          <p:nvPr/>
+        </p:nvSpPr>
+        <p:spPr>
+          <a:xfrm>
+            <a:off x="749185" y="2497482"/>
+            <a:ext cx="10479674" cy="4095823"/>
+          </a:xfrm>
+          <a:prstGeom prst="roundRect">
+            <a:avLst>
+              <a:gd name="adj" fmla="val 8081"/>
+            </a:avLst>
+          </a:prstGeom>
+          <a:solidFill>
+            <a:srgbClr val="1E1E1E"/>
+          </a:solidFill>
+          <a:ln>
+            <a:solidFill>
+              <a:srgbClr val="1E1E1E"/>
+            </a:solidFill>
+          </a:ln>
+        </p:spPr>
+        <p:txBody>
+          <a:bodyPr/>
+          <a:lstStyle/>
+          <a:p>
+            <a:endParaRPr lang="pt-BR" altLang="pt-BR" sz="1600" dirty="0">
+              <a:solidFill>
+                <a:srgbClr val="B3AE60"/>
+              </a:solidFill>
+              <a:latin typeface="Consolas" panose="020B0609020204030204" pitchFamily="49" charset="0"/>
+            </a:endParaRPr>
+          </a:p>
+        </p:txBody>
+      </p:sp>
+      <p:sp>
+        <p:nvSpPr>
+          <p:cNvPr id="6" name="CaixaDeTexto 5">
+            <a:extLst>
+              <a:ext uri="{FF2B5EF4-FFF2-40B4-BE49-F238E27FC236}">
+                <a16:creationId xmlns:a16="http://schemas.microsoft.com/office/drawing/2014/main" id="{3C58AA94-9722-B4E2-F882-9C1A2491D851}"/>
+              </a:ext>
+            </a:extLst>
+          </p:cNvPr>
+          <p:cNvSpPr txBox="1"/>
+          <p:nvPr/>
+        </p:nvSpPr>
+        <p:spPr>
+          <a:xfrm>
+            <a:off x="1052065" y="2775678"/>
+            <a:ext cx="9873915" cy="3539430"/>
+          </a:xfrm>
+          <a:prstGeom prst="rect">
+            <a:avLst/>
+          </a:prstGeom>
+          <a:noFill/>
+        </p:spPr>
+        <p:txBody>
+          <a:bodyPr wrap="square">
+            <a:spAutoFit/>
+          </a:bodyPr>
+          <a:lstStyle/>
+          <a:p>
+            <a:pPr>
+              <a:buNone/>
+            </a:pPr>
+            <a:r>
+              <a:rPr lang="pt-BR" sz="1600" dirty="0" err="1">
+                <a:solidFill>
+                  <a:srgbClr val="CF8E6D"/>
+                </a:solidFill>
+                <a:effectLst/>
+                <a:latin typeface="JetBrains Mono"/>
+              </a:rPr>
+              <a:t>public</a:t>
+            </a:r>
+            <a:r>
+              <a:rPr lang="pt-BR" sz="1600" dirty="0">
+                <a:solidFill>
+                  <a:srgbClr val="CF8E6D"/>
+                </a:solidFill>
+                <a:effectLst/>
+                <a:latin typeface="JetBrains Mono"/>
+              </a:rPr>
+              <a:t> </a:t>
+            </a:r>
+            <a:r>
+              <a:rPr lang="pt-BR" sz="1600" dirty="0" err="1">
+                <a:solidFill>
+                  <a:srgbClr val="BCBEC4"/>
+                </a:solidFill>
+                <a:effectLst/>
+                <a:latin typeface="JetBrains Mono"/>
+              </a:rPr>
+              <a:t>String</a:t>
+            </a:r>
+            <a:r>
+              <a:rPr lang="pt-BR" sz="1600" dirty="0">
+                <a:solidFill>
+                  <a:srgbClr val="BCBEC4"/>
+                </a:solidFill>
+                <a:effectLst/>
+                <a:latin typeface="JetBrains Mono"/>
+              </a:rPr>
+              <a:t> </a:t>
+            </a:r>
+            <a:r>
+              <a:rPr lang="pt-BR" sz="1600" dirty="0" err="1">
+                <a:solidFill>
+                  <a:srgbClr val="BCBEC4"/>
+                </a:solidFill>
+                <a:effectLst/>
+                <a:latin typeface="JetBrains Mono"/>
+              </a:rPr>
+              <a:t>getSubject</a:t>
+            </a:r>
+            <a:r>
+              <a:rPr lang="pt-BR" sz="1600" dirty="0">
+                <a:solidFill>
+                  <a:srgbClr val="BCBEC4"/>
+                </a:solidFill>
+                <a:effectLst/>
+                <a:latin typeface="JetBrains Mono"/>
+              </a:rPr>
+              <a:t>(</a:t>
+            </a:r>
+            <a:r>
+              <a:rPr lang="pt-BR" sz="1600" dirty="0" err="1">
+                <a:solidFill>
+                  <a:srgbClr val="BCBEC4"/>
+                </a:solidFill>
+                <a:effectLst/>
+                <a:latin typeface="JetBrains Mono"/>
+              </a:rPr>
+              <a:t>String</a:t>
+            </a:r>
+            <a:r>
+              <a:rPr lang="pt-BR" sz="1600" dirty="0">
+                <a:solidFill>
+                  <a:srgbClr val="BCBEC4"/>
+                </a:solidFill>
+                <a:effectLst/>
+                <a:latin typeface="JetBrains Mono"/>
+              </a:rPr>
+              <a:t> </a:t>
+            </a:r>
+            <a:r>
+              <a:rPr lang="pt-BR" sz="1600" dirty="0" err="1">
+                <a:solidFill>
+                  <a:srgbClr val="BCBEC4"/>
+                </a:solidFill>
+                <a:effectLst/>
+                <a:latin typeface="JetBrains Mono"/>
+              </a:rPr>
+              <a:t>tokenJWT</a:t>
+            </a:r>
+            <a:r>
+              <a:rPr lang="pt-BR" sz="1600" dirty="0">
+                <a:solidFill>
+                  <a:srgbClr val="BCBEC4"/>
+                </a:solidFill>
+                <a:effectLst/>
+                <a:latin typeface="JetBrains Mono"/>
+              </a:rPr>
+              <a:t>){</a:t>
+            </a:r>
+            <a:br>
+              <a:rPr lang="pt-BR" sz="1600" dirty="0">
+                <a:solidFill>
+                  <a:srgbClr val="BCBEC4"/>
+                </a:solidFill>
+                <a:effectLst/>
+                <a:latin typeface="JetBrains Mono"/>
+              </a:rPr>
+            </a:br>
+            <a:r>
+              <a:rPr lang="pt-BR" sz="1600" dirty="0">
+                <a:solidFill>
+                  <a:srgbClr val="BCBEC4"/>
+                </a:solidFill>
+                <a:effectLst/>
+                <a:latin typeface="JetBrains Mono"/>
+              </a:rPr>
+              <a:t>    </a:t>
+            </a:r>
+            <a:r>
+              <a:rPr lang="pt-BR" sz="1600" dirty="0" err="1">
+                <a:solidFill>
+                  <a:srgbClr val="CF8E6D"/>
+                </a:solidFill>
+                <a:effectLst/>
+                <a:latin typeface="JetBrains Mono"/>
+              </a:rPr>
+              <a:t>try</a:t>
+            </a:r>
+            <a:r>
+              <a:rPr lang="pt-BR" sz="1600" dirty="0">
+                <a:solidFill>
+                  <a:srgbClr val="CF8E6D"/>
+                </a:solidFill>
+                <a:effectLst/>
+                <a:latin typeface="JetBrains Mono"/>
+              </a:rPr>
+              <a:t> </a:t>
+            </a:r>
+            <a:r>
+              <a:rPr lang="pt-BR" sz="1600" dirty="0">
+                <a:solidFill>
+                  <a:srgbClr val="BCBEC4"/>
+                </a:solidFill>
+                <a:effectLst/>
+                <a:latin typeface="JetBrains Mono"/>
+              </a:rPr>
+              <a:t>{</a:t>
+            </a:r>
+            <a:br>
+              <a:rPr lang="pt-BR" sz="1600" dirty="0">
+                <a:solidFill>
+                  <a:srgbClr val="BCBEC4"/>
+                </a:solidFill>
+                <a:effectLst/>
+                <a:latin typeface="JetBrains Mono"/>
+              </a:rPr>
+            </a:br>
+            <a:r>
+              <a:rPr lang="pt-BR" sz="1600" dirty="0">
+                <a:solidFill>
+                  <a:srgbClr val="BCBEC4"/>
+                </a:solidFill>
+                <a:effectLst/>
+                <a:latin typeface="JetBrains Mono"/>
+              </a:rPr>
+              <a:t>        var </a:t>
+            </a:r>
+            <a:r>
+              <a:rPr lang="pt-BR" sz="1600" dirty="0" err="1">
+                <a:solidFill>
+                  <a:srgbClr val="BCBEC4"/>
+                </a:solidFill>
+                <a:effectLst/>
+                <a:latin typeface="JetBrains Mono"/>
+              </a:rPr>
+              <a:t>algorithm</a:t>
+            </a:r>
+            <a:r>
+              <a:rPr lang="pt-BR" sz="1600" dirty="0">
+                <a:solidFill>
+                  <a:srgbClr val="BCBEC4"/>
+                </a:solidFill>
+                <a:effectLst/>
+                <a:latin typeface="JetBrains Mono"/>
+              </a:rPr>
+              <a:t> = Algorithm.HMAC256(</a:t>
+            </a:r>
+            <a:r>
+              <a:rPr lang="pt-BR" sz="1600" dirty="0" err="1">
+                <a:solidFill>
+                  <a:srgbClr val="BCBEC4"/>
+                </a:solidFill>
+                <a:effectLst/>
+                <a:latin typeface="JetBrains Mono"/>
+              </a:rPr>
+              <a:t>secr</a:t>
+            </a:r>
+            <a:r>
+              <a:rPr lang="pt-BR" sz="1600" u="sng" dirty="0" err="1">
+                <a:solidFill>
+                  <a:srgbClr val="BCBEC4"/>
+                </a:solidFill>
+                <a:effectLst/>
+                <a:latin typeface="JetBrains Mono"/>
+              </a:rPr>
+              <a:t>e</a:t>
+            </a:r>
+            <a:r>
+              <a:rPr lang="pt-BR" sz="1600" dirty="0" err="1">
+                <a:solidFill>
+                  <a:srgbClr val="BCBEC4"/>
+                </a:solidFill>
+                <a:effectLst/>
+                <a:latin typeface="JetBrains Mono"/>
+              </a:rPr>
+              <a:t>t</a:t>
+            </a:r>
+            <a:r>
+              <a:rPr lang="pt-BR" sz="1600" dirty="0">
+                <a:solidFill>
+                  <a:srgbClr val="BCBEC4"/>
+                </a:solidFill>
+                <a:effectLst/>
+                <a:latin typeface="JetBrains Mono"/>
+              </a:rPr>
+              <a:t>);</a:t>
+            </a:r>
+            <a:br>
+              <a:rPr lang="pt-BR" sz="1600" dirty="0">
+                <a:solidFill>
+                  <a:srgbClr val="BCBEC4"/>
+                </a:solidFill>
+                <a:effectLst/>
+                <a:latin typeface="JetBrains Mono"/>
+              </a:rPr>
+            </a:br>
+            <a:br>
+              <a:rPr lang="pt-BR" sz="1600" dirty="0">
+                <a:solidFill>
+                  <a:srgbClr val="BCBEC4"/>
+                </a:solidFill>
+                <a:effectLst/>
+                <a:latin typeface="JetBrains Mono"/>
+              </a:rPr>
+            </a:br>
+            <a:r>
+              <a:rPr lang="pt-BR" sz="1600" dirty="0">
+                <a:solidFill>
+                  <a:srgbClr val="BCBEC4"/>
+                </a:solidFill>
+                <a:effectLst/>
+                <a:latin typeface="JetBrains Mono"/>
+              </a:rPr>
+              <a:t>        </a:t>
+            </a:r>
+            <a:r>
+              <a:rPr lang="pt-BR" sz="1600" dirty="0" err="1">
+                <a:solidFill>
+                  <a:srgbClr val="CF8E6D"/>
+                </a:solidFill>
+                <a:effectLst/>
+                <a:latin typeface="JetBrains Mono"/>
+              </a:rPr>
+              <a:t>return</a:t>
+            </a:r>
+            <a:r>
+              <a:rPr lang="pt-BR" sz="1600" dirty="0">
+                <a:solidFill>
+                  <a:srgbClr val="CF8E6D"/>
+                </a:solidFill>
+                <a:effectLst/>
+                <a:latin typeface="JetBrains Mono"/>
+              </a:rPr>
+              <a:t> </a:t>
+            </a:r>
+            <a:r>
+              <a:rPr lang="pt-BR" sz="1600" dirty="0" err="1">
+                <a:solidFill>
+                  <a:srgbClr val="BCBEC4"/>
+                </a:solidFill>
+                <a:effectLst/>
+                <a:latin typeface="JetBrains Mono"/>
+              </a:rPr>
+              <a:t>JWT.require</a:t>
+            </a:r>
+            <a:r>
+              <a:rPr lang="pt-BR" sz="1600" dirty="0">
+                <a:solidFill>
+                  <a:srgbClr val="BCBEC4"/>
+                </a:solidFill>
+                <a:effectLst/>
+                <a:latin typeface="JetBrains Mono"/>
+              </a:rPr>
+              <a:t>(</a:t>
+            </a:r>
+            <a:r>
+              <a:rPr lang="pt-BR" sz="1600" dirty="0" err="1">
+                <a:solidFill>
+                  <a:srgbClr val="BCBEC4"/>
+                </a:solidFill>
+                <a:effectLst/>
+                <a:latin typeface="JetBrains Mono"/>
+              </a:rPr>
+              <a:t>algorithm</a:t>
+            </a:r>
+            <a:r>
+              <a:rPr lang="pt-BR" sz="1600" dirty="0">
+                <a:solidFill>
+                  <a:srgbClr val="BCBEC4"/>
+                </a:solidFill>
+                <a:effectLst/>
+                <a:latin typeface="JetBrains Mono"/>
+              </a:rPr>
+              <a:t>)</a:t>
+            </a:r>
+            <a:br>
+              <a:rPr lang="pt-BR" sz="1600" dirty="0">
+                <a:solidFill>
+                  <a:srgbClr val="7A7E85"/>
+                </a:solidFill>
+                <a:effectLst/>
+                <a:latin typeface="JetBrains Mono"/>
+              </a:rPr>
+            </a:br>
+            <a:r>
+              <a:rPr lang="pt-BR" sz="1600" dirty="0">
+                <a:solidFill>
+                  <a:srgbClr val="7A7E85"/>
+                </a:solidFill>
+                <a:effectLst/>
+                <a:latin typeface="JetBrains Mono"/>
+              </a:rPr>
+              <a:t>                </a:t>
+            </a:r>
+            <a:r>
+              <a:rPr lang="pt-BR" sz="1600" dirty="0">
+                <a:solidFill>
+                  <a:srgbClr val="BCBEC4"/>
+                </a:solidFill>
+                <a:effectLst/>
+                <a:latin typeface="JetBrains Mono"/>
+              </a:rPr>
+              <a:t>.</a:t>
+            </a:r>
+            <a:r>
+              <a:rPr lang="pt-BR" sz="1600" dirty="0" err="1">
+                <a:solidFill>
+                  <a:srgbClr val="BCBEC4"/>
+                </a:solidFill>
+                <a:effectLst/>
+                <a:latin typeface="JetBrains Mono"/>
+              </a:rPr>
+              <a:t>withIssuer</a:t>
+            </a:r>
+            <a:r>
+              <a:rPr lang="pt-BR" sz="1600" dirty="0">
+                <a:solidFill>
+                  <a:srgbClr val="BCBEC4"/>
+                </a:solidFill>
+                <a:effectLst/>
+                <a:latin typeface="JetBrains Mono"/>
+              </a:rPr>
+              <a:t>(</a:t>
+            </a:r>
+            <a:r>
+              <a:rPr lang="pt-BR" sz="1600" dirty="0">
+                <a:solidFill>
+                  <a:srgbClr val="6AAB73"/>
+                </a:solidFill>
+                <a:effectLst/>
+                <a:latin typeface="JetBrains Mono"/>
+              </a:rPr>
+              <a:t>"API PEDRO"</a:t>
+            </a:r>
+            <a:r>
+              <a:rPr lang="pt-BR" sz="1600" dirty="0">
+                <a:solidFill>
+                  <a:srgbClr val="BCBEC4"/>
+                </a:solidFill>
+                <a:effectLst/>
+                <a:latin typeface="JetBrains Mono"/>
+              </a:rPr>
+              <a:t>)</a:t>
+            </a:r>
+            <a:br>
+              <a:rPr lang="pt-BR" sz="1600" dirty="0">
+                <a:solidFill>
+                  <a:srgbClr val="7A7E85"/>
+                </a:solidFill>
+                <a:effectLst/>
+                <a:latin typeface="JetBrains Mono"/>
+              </a:rPr>
+            </a:br>
+            <a:r>
+              <a:rPr lang="pt-BR" sz="1600" dirty="0">
+                <a:solidFill>
+                  <a:srgbClr val="7A7E85"/>
+                </a:solidFill>
+                <a:effectLst/>
+                <a:latin typeface="JetBrains Mono"/>
+              </a:rPr>
+              <a:t>                </a:t>
+            </a:r>
+            <a:r>
+              <a:rPr lang="pt-BR" sz="1600" dirty="0">
+                <a:solidFill>
+                  <a:srgbClr val="BCBEC4"/>
+                </a:solidFill>
+                <a:effectLst/>
+                <a:latin typeface="JetBrains Mono"/>
+              </a:rPr>
+              <a:t>.build()</a:t>
+            </a:r>
+            <a:br>
+              <a:rPr lang="pt-BR" sz="1600" dirty="0">
+                <a:solidFill>
+                  <a:srgbClr val="BCBEC4"/>
+                </a:solidFill>
+                <a:effectLst/>
+                <a:latin typeface="JetBrains Mono"/>
+              </a:rPr>
+            </a:br>
+            <a:r>
+              <a:rPr lang="pt-BR" sz="1600" dirty="0">
+                <a:solidFill>
+                  <a:srgbClr val="BCBEC4"/>
+                </a:solidFill>
+                <a:effectLst/>
+                <a:latin typeface="JetBrains Mono"/>
+              </a:rPr>
+              <a:t>                .</a:t>
+            </a:r>
+            <a:r>
+              <a:rPr lang="pt-BR" sz="1600" dirty="0" err="1">
+                <a:solidFill>
+                  <a:srgbClr val="BCBEC4"/>
+                </a:solidFill>
+                <a:effectLst/>
+                <a:latin typeface="JetBrains Mono"/>
+              </a:rPr>
+              <a:t>verify</a:t>
+            </a:r>
+            <a:r>
+              <a:rPr lang="pt-BR" sz="1600" dirty="0">
+                <a:solidFill>
+                  <a:srgbClr val="BCBEC4"/>
+                </a:solidFill>
+                <a:effectLst/>
+                <a:latin typeface="JetBrains Mono"/>
+              </a:rPr>
+              <a:t>(</a:t>
+            </a:r>
+            <a:r>
+              <a:rPr lang="pt-BR" sz="1600" dirty="0" err="1">
+                <a:solidFill>
+                  <a:srgbClr val="BCBEC4"/>
+                </a:solidFill>
+                <a:effectLst/>
+                <a:latin typeface="JetBrains Mono"/>
+              </a:rPr>
+              <a:t>tokenJWT</a:t>
+            </a:r>
+            <a:r>
+              <a:rPr lang="pt-BR" sz="1600" dirty="0">
+                <a:solidFill>
+                  <a:srgbClr val="BCBEC4"/>
+                </a:solidFill>
+                <a:effectLst/>
+                <a:latin typeface="JetBrains Mono"/>
+              </a:rPr>
+              <a:t>)</a:t>
+            </a:r>
+            <a:br>
+              <a:rPr lang="pt-BR" sz="1600" dirty="0">
+                <a:solidFill>
+                  <a:srgbClr val="BCBEC4"/>
+                </a:solidFill>
+                <a:effectLst/>
+                <a:latin typeface="JetBrains Mono"/>
+              </a:rPr>
+            </a:br>
+            <a:r>
+              <a:rPr lang="pt-BR" sz="1600" dirty="0">
+                <a:solidFill>
+                  <a:srgbClr val="BCBEC4"/>
+                </a:solidFill>
+                <a:effectLst/>
+                <a:latin typeface="JetBrains Mono"/>
+              </a:rPr>
+              <a:t>                .</a:t>
+            </a:r>
+            <a:r>
+              <a:rPr lang="pt-BR" sz="1600" dirty="0" err="1">
+                <a:solidFill>
+                  <a:srgbClr val="BCBEC4"/>
+                </a:solidFill>
+                <a:effectLst/>
+                <a:latin typeface="JetBrains Mono"/>
+              </a:rPr>
+              <a:t>getSubject</a:t>
+            </a:r>
+            <a:r>
+              <a:rPr lang="pt-BR" sz="1600" dirty="0">
+                <a:solidFill>
+                  <a:srgbClr val="BCBEC4"/>
+                </a:solidFill>
+                <a:effectLst/>
+                <a:latin typeface="JetBrains Mono"/>
+              </a:rPr>
+              <a:t>();</a:t>
+            </a:r>
+            <a:br>
+              <a:rPr lang="pt-BR" sz="1600" dirty="0">
+                <a:solidFill>
+                  <a:srgbClr val="BCBEC4"/>
+                </a:solidFill>
+                <a:effectLst/>
+                <a:latin typeface="JetBrains Mono"/>
+              </a:rPr>
+            </a:br>
+            <a:br>
+              <a:rPr lang="pt-BR" sz="1600" dirty="0">
+                <a:solidFill>
+                  <a:srgbClr val="BCBEC4"/>
+                </a:solidFill>
+                <a:effectLst/>
+                <a:latin typeface="JetBrains Mono"/>
+              </a:rPr>
+            </a:br>
+            <a:r>
+              <a:rPr lang="pt-BR" sz="1600" dirty="0">
+                <a:solidFill>
+                  <a:srgbClr val="BCBEC4"/>
+                </a:solidFill>
+                <a:effectLst/>
+                <a:latin typeface="JetBrains Mono"/>
+              </a:rPr>
+              <a:t>    } </a:t>
+            </a:r>
+            <a:r>
+              <a:rPr lang="pt-BR" sz="1600" dirty="0">
+                <a:solidFill>
+                  <a:srgbClr val="CF8E6D"/>
+                </a:solidFill>
+                <a:effectLst/>
+                <a:latin typeface="JetBrains Mono"/>
+              </a:rPr>
+              <a:t>catch </a:t>
+            </a:r>
+            <a:r>
+              <a:rPr lang="pt-BR" sz="1600" dirty="0">
+                <a:solidFill>
+                  <a:srgbClr val="BCBEC4"/>
+                </a:solidFill>
+                <a:effectLst/>
+                <a:latin typeface="JetBrains Mono"/>
+              </a:rPr>
+              <a:t>(</a:t>
+            </a:r>
+            <a:r>
+              <a:rPr lang="pt-BR" sz="1600" dirty="0" err="1">
+                <a:solidFill>
+                  <a:srgbClr val="BCBEC4"/>
+                </a:solidFill>
+                <a:effectLst/>
+                <a:latin typeface="JetBrains Mono"/>
+              </a:rPr>
+              <a:t>JWTVerificationException</a:t>
+            </a:r>
+            <a:r>
+              <a:rPr lang="pt-BR" sz="1600" dirty="0">
+                <a:solidFill>
+                  <a:srgbClr val="BCBEC4"/>
+                </a:solidFill>
+                <a:effectLst/>
+                <a:latin typeface="JetBrains Mono"/>
+              </a:rPr>
+              <a:t> </a:t>
+            </a:r>
+            <a:r>
+              <a:rPr lang="pt-BR" sz="1600" dirty="0" err="1">
+                <a:solidFill>
+                  <a:srgbClr val="BCBEC4"/>
+                </a:solidFill>
+                <a:effectLst/>
+                <a:latin typeface="JetBrains Mono"/>
+              </a:rPr>
+              <a:t>exception</a:t>
+            </a:r>
+            <a:r>
+              <a:rPr lang="pt-BR" sz="1600" dirty="0">
+                <a:solidFill>
+                  <a:srgbClr val="BCBEC4"/>
+                </a:solidFill>
+                <a:effectLst/>
+                <a:latin typeface="JetBrains Mono"/>
+              </a:rPr>
+              <a:t>){</a:t>
+            </a:r>
+            <a:br>
+              <a:rPr lang="pt-BR" sz="1600" dirty="0">
+                <a:solidFill>
+                  <a:srgbClr val="BCBEC4"/>
+                </a:solidFill>
+                <a:effectLst/>
+                <a:latin typeface="JetBrains Mono"/>
+              </a:rPr>
+            </a:br>
+            <a:r>
+              <a:rPr lang="pt-BR" sz="1600" dirty="0">
+                <a:solidFill>
+                  <a:srgbClr val="BCBEC4"/>
+                </a:solidFill>
+                <a:effectLst/>
+                <a:latin typeface="JetBrains Mono"/>
+              </a:rPr>
+              <a:t>        </a:t>
+            </a:r>
+            <a:r>
+              <a:rPr lang="pt-BR" sz="1600" dirty="0" err="1">
+                <a:solidFill>
+                  <a:srgbClr val="CF8E6D"/>
+                </a:solidFill>
+                <a:effectLst/>
+                <a:latin typeface="JetBrains Mono"/>
+              </a:rPr>
+              <a:t>throw</a:t>
+            </a:r>
+            <a:r>
+              <a:rPr lang="pt-BR" sz="1600" dirty="0">
+                <a:solidFill>
+                  <a:srgbClr val="CF8E6D"/>
+                </a:solidFill>
+                <a:effectLst/>
+                <a:latin typeface="JetBrains Mono"/>
+              </a:rPr>
+              <a:t> new </a:t>
+            </a:r>
+            <a:r>
+              <a:rPr lang="pt-BR" sz="1600" dirty="0" err="1">
+                <a:solidFill>
+                  <a:srgbClr val="BCBEC4"/>
+                </a:solidFill>
+                <a:effectLst/>
+                <a:latin typeface="JetBrains Mono"/>
+              </a:rPr>
+              <a:t>RuntimeException</a:t>
+            </a:r>
+            <a:r>
+              <a:rPr lang="pt-BR" sz="1600" dirty="0">
+                <a:solidFill>
+                  <a:srgbClr val="BCBEC4"/>
+                </a:solidFill>
+                <a:effectLst/>
+                <a:latin typeface="JetBrains Mono"/>
+              </a:rPr>
+              <a:t>(</a:t>
+            </a:r>
+            <a:r>
+              <a:rPr lang="pt-BR" sz="1600" dirty="0">
+                <a:solidFill>
+                  <a:srgbClr val="6AAB73"/>
+                </a:solidFill>
+                <a:effectLst/>
+                <a:latin typeface="JetBrains Mono"/>
+              </a:rPr>
+              <a:t>"Token </a:t>
+            </a:r>
+            <a:r>
+              <a:rPr lang="pt-BR" sz="1600" dirty="0" err="1">
+                <a:solidFill>
+                  <a:srgbClr val="6AAB73"/>
+                </a:solidFill>
+                <a:effectLst/>
+                <a:latin typeface="JetBrains Mono"/>
+              </a:rPr>
+              <a:t>jwt</a:t>
+            </a:r>
+            <a:r>
+              <a:rPr lang="pt-BR" sz="1600" dirty="0">
+                <a:solidFill>
+                  <a:srgbClr val="6AAB73"/>
+                </a:solidFill>
+                <a:effectLst/>
+                <a:latin typeface="JetBrains Mono"/>
+              </a:rPr>
+              <a:t> inválido"</a:t>
+            </a:r>
+            <a:r>
+              <a:rPr lang="pt-BR" sz="1600" dirty="0">
+                <a:solidFill>
+                  <a:srgbClr val="BCBEC4"/>
+                </a:solidFill>
+                <a:effectLst/>
+                <a:latin typeface="JetBrains Mono"/>
+              </a:rPr>
+              <a:t>);</a:t>
+            </a:r>
+            <a:br>
+              <a:rPr lang="pt-BR" sz="1600" dirty="0">
+                <a:solidFill>
+                  <a:srgbClr val="BCBEC4"/>
+                </a:solidFill>
+                <a:effectLst/>
+                <a:latin typeface="JetBrains Mono"/>
+              </a:rPr>
+            </a:br>
+            <a:r>
+              <a:rPr lang="pt-BR" sz="1600" dirty="0">
+                <a:solidFill>
+                  <a:srgbClr val="BCBEC4"/>
+                </a:solidFill>
+                <a:effectLst/>
+                <a:latin typeface="JetBrains Mono"/>
+              </a:rPr>
+              <a:t>    }</a:t>
+            </a:r>
+            <a:br>
+              <a:rPr lang="pt-BR" sz="1600" dirty="0">
+                <a:solidFill>
+                  <a:srgbClr val="BCBEC4"/>
+                </a:solidFill>
+                <a:effectLst/>
+                <a:latin typeface="JetBrains Mono"/>
+              </a:rPr>
+            </a:br>
+            <a:r>
+              <a:rPr lang="pt-BR" sz="1600" dirty="0">
+                <a:solidFill>
+                  <a:srgbClr val="BCBEC4"/>
+                </a:solidFill>
+                <a:effectLst/>
+                <a:latin typeface="JetBrains Mono"/>
+              </a:rPr>
+              <a:t>}</a:t>
+            </a:r>
           </a:p>
         </p:txBody>
       </p:sp>
@@ -5400,7 +6195,10 @@
           <a:bodyPr/>
           <a:lstStyle/>
           <a:p>
-            <a:endParaRPr lang="pt-BR"/>
+            <a:r>
+              <a:rPr lang="pt-BR" dirty="0"/>
+              <a:t>Permissão para acessar os tokens</a:t>
+            </a:r>
           </a:p>
         </p:txBody>
       </p:sp>
